--- a/presentation/JJA2025_Sudan_forecast_risk.pptx
+++ b/presentation/JJA2025_Sudan_forecast_risk.pptx
@@ -10549,7 +10549,7 @@
                 </a:solidFill>
                 <a:latin typeface="Arial"/>
               </a:rPr>
-              <a:t>96</a:t>
+              <a:t>103</a:t>
             </a:r>
           </a:p>
         </p:txBody>
